--- a/lci_cdh1.pptx
+++ b/lci_cdh1.pptx
@@ -3512,34 +3512,6 @@
               <a:rPr/>
               <a:t>Stomach Cancer and CDH1 Gene</a:t>
             </a:r>
-          </a:p>
-        </p:txBody>
-      </p:sp>
-      <p:sp>
-        <p:nvSpPr>
-          <p:cNvPr id="3" name="Subtitle 2"/>
-          <p:cNvSpPr>
-            <a:spLocks noGrp="1"/>
-          </p:cNvSpPr>
-          <p:nvPr>
-            <p:ph idx="1" type="subTitle"/>
-          </p:nvPr>
-        </p:nvSpPr>
-        <p:spPr>
-          <a:xfrm>
-            <a:off x="1371600" y="2914650"/>
-            <a:ext cx="6400800" cy="1314450"/>
-          </a:xfrm>
-        </p:spPr>
-        <p:txBody>
-          <a:bodyPr/>
-          <a:lstStyle/>
-          <a:p>
-            <a:pPr lvl="0" indent="0" marL="0">
-              <a:buNone/>
-            </a:pPr>
-            <a:br/>
-            <a:br/>
           </a:p>
         </p:txBody>
       </p:sp>

--- a/lci_cdh1.pptx
+++ b/lci_cdh1.pptx
@@ -4588,7 +4588,30 @@
             </a:pPr>
             <a:r>
               <a:rPr/>
-              <a:t>Navigator - Laura Swift</a:t>
+              <a:t>Navigators</a:t>
+            </a:r>
+          </a:p>
+          <a:p>
+            <a:pPr lvl="0"/>
+            <a:r>
+              <a:rPr/>
+              <a:t>Laura Swift</a:t>
+            </a:r>
+          </a:p>
+          <a:p>
+            <a:pPr lvl="0"/>
+            <a:r>
+              <a:rPr/>
+              <a:t>Lorna Espinal</a:t>
+            </a:r>
+          </a:p>
+          <a:p>
+            <a:pPr lvl="0" indent="0" marL="0">
+              <a:buNone/>
+            </a:pPr>
+            <a:r>
+              <a:rPr/>
+              <a:t>Care Coordinator - Karen Julian-Martinez</a:t>
             </a:r>
           </a:p>
         </p:txBody>

--- a/lci_cdh1.pptx
+++ b/lci_cdh1.pptx
@@ -4550,6 +4550,15 @@
         <p:txBody>
           <a:bodyPr/>
           <a:lstStyle/>
+          <a:p>
+            <a:pPr lvl="0" indent="0" marL="0">
+              <a:buNone/>
+            </a:pPr>
+            <a:r>
+              <a:rPr/>
+              <a:t>Physician Assistant - Kate Duncan PA-C</a:t>
+            </a:r>
+          </a:p>
           <a:p>
             <a:pPr lvl="0" indent="0" marL="0">
               <a:buNone/>
